--- a/Schools_ML_Track/camp_2026/slides/DA/DA15.pptx
+++ b/Schools_ML_Track/camp_2026/slides/DA/DA15.pptx
@@ -128,7 +128,7 @@
   <p:extLst>
     <p:ext uri="{521415D9-36F7-43E2-AB2F-B90AF26B5E84}">
       <p14:sectionLst xmlns:p14="http://schemas.microsoft.com/office/powerpoint/2010/main">
-        <p14:section name="Opening" id="{626932fb-641e-1ff0-b47f-d57bb63f2555}">
+        <p14:section name="Opening" id="{d7349503-4ad7-49bc-8d4c-858ad51078ba}">
           <p14:sldIdLst>
             <p14:sldId id="256"/>
             <p14:sldId id="257"/>
@@ -139,7 +139,7 @@
             <p14:sldId id="262"/>
           </p14:sldIdLst>
         </p14:section>
-        <p14:section name="Block A" id="{a3915d96-eded-3a55-7fdd-e076235b472c}">
+        <p14:section name="Block A" id="{f6c2345e-8e1f-beb1-281b-ccc73896f0ef}">
           <p14:sldIdLst>
             <p14:sldId id="263"/>
             <p14:sldId id="264"/>
@@ -149,15 +149,15 @@
             <p14:sldId id="269"/>
           </p14:sldIdLst>
         </p14:section>
-        <p14:section name="Break" id="{d5ae77ab-d435-e900-9c1f-356a544f25d3}">
+        <p14:section name="Break" id="{45972e96-e54c-af9d-bff9-86cc260a9486}">
           <p14:sldIdLst>
             <p14:sldId id="267"/>
           </p14:sldIdLst>
         </p14:section>
-        <p14:section name="Block A" id="{f7398af2-9dc8-4d38-148d-d7f18a8f0aae}">
+        <p14:section name="Block A" id="{167b5084-068f-0578-2351-cfe55cabcad9}">
           <p14:sldIdLst/>
         </p14:section>
-        <p14:section name="Block B" id="{a85e71e4-3da9-53ee-b4e8-e13cbee1e1e0}">
+        <p14:section name="Block B" id="{65252187-2018-d793-748b-fcf00fd040db}">
           <p14:sldIdLst>
             <p14:sldId id="270"/>
             <p14:sldId id="271"/>
@@ -166,7 +166,7 @@
             <p14:sldId id="274"/>
           </p14:sldIdLst>
         </p14:section>
-        <p14:section name="Make and close" id="{e3fd69e1-c7b5-1b7b-80a2-b9a9a6bfecb8}">
+        <p14:section name="Make and close" id="{f1eec3ed-f39f-9a3d-f4c5-61205612d096}">
           <p14:sldIdLst>
             <p14:sldId id="275"/>
             <p14:sldId id="276"/>

--- a/Schools_ML_Track/camp_2026/slides/DA/DA15.pptx
+++ b/Schools_ML_Track/camp_2026/slides/DA/DA15.pptx
@@ -128,7 +128,7 @@
   <p:extLst>
     <p:ext uri="{521415D9-36F7-43E2-AB2F-B90AF26B5E84}">
       <p14:sectionLst xmlns:p14="http://schemas.microsoft.com/office/powerpoint/2010/main">
-        <p14:section name="Opening" id="{d7349503-4ad7-49bc-8d4c-858ad51078ba}">
+        <p14:section name="Opening" id="{f41c982c-76be-afac-21c6-38aa6a1e8ad8}">
           <p14:sldIdLst>
             <p14:sldId id="256"/>
             <p14:sldId id="257"/>
@@ -139,7 +139,7 @@
             <p14:sldId id="262"/>
           </p14:sldIdLst>
         </p14:section>
-        <p14:section name="Block A" id="{f6c2345e-8e1f-beb1-281b-ccc73896f0ef}">
+        <p14:section name="Block A" id="{de55da7a-3cf5-af3d-9188-d750d748d02c}">
           <p14:sldIdLst>
             <p14:sldId id="263"/>
             <p14:sldId id="264"/>
@@ -149,15 +149,15 @@
             <p14:sldId id="269"/>
           </p14:sldIdLst>
         </p14:section>
-        <p14:section name="Break" id="{45972e96-e54c-af9d-bff9-86cc260a9486}">
+        <p14:section name="Break" id="{ef2f244f-3bbc-f85b-65a7-89619aa66592}">
           <p14:sldIdLst>
             <p14:sldId id="267"/>
           </p14:sldIdLst>
         </p14:section>
-        <p14:section name="Block A" id="{167b5084-068f-0578-2351-cfe55cabcad9}">
+        <p14:section name="Block A" id="{5cd9396d-ca0f-8f95-9c4d-0986467c2646}">
           <p14:sldIdLst/>
         </p14:section>
-        <p14:section name="Block B" id="{65252187-2018-d793-748b-fcf00fd040db}">
+        <p14:section name="Block B" id="{9e6807d9-bee2-c6aa-7086-6e1e45112071}">
           <p14:sldIdLst>
             <p14:sldId id="270"/>
             <p14:sldId id="271"/>
@@ -166,7 +166,7 @@
             <p14:sldId id="274"/>
           </p14:sldIdLst>
         </p14:section>
-        <p14:section name="Make and close" id="{f1eec3ed-f39f-9a3d-f4c5-61205612d096}">
+        <p14:section name="Make and close" id="{d7f646ce-5a97-6cf1-919c-6c77d1eb62b6}">
           <p14:sldIdLst>
             <p14:sldId id="275"/>
             <p14:sldId id="276"/>
@@ -3196,7 +3196,24 @@
                 <a:ea typeface="Lato" pitchFamily="34" charset="-122"/>
                 <a:cs typeface="Lato" pitchFamily="34" charset="-120"/>
               </a:rPr>
-              <a:t>Exploring relationships: scatter plots, correlation and cause</a:t>
+              <a:t>Exploring relationships: scatter</a:t>
+            </a:r>
+            <a:endParaRPr lang="en-US" sz="5600" dirty="0"/>
+          </a:p>
+          <a:p>
+            <a:pPr algn="l" indent="0" marL="0">
+              <a:buNone/>
+            </a:pPr>
+            <a:r>
+              <a:rPr lang="en-US" sz="5600" b="1" dirty="0">
+                <a:solidFill>
+                  <a:srgbClr val="FFFFFF"/>
+                </a:solidFill>
+                <a:latin typeface="Lato" pitchFamily="34" charset="0"/>
+                <a:ea typeface="Lato" pitchFamily="34" charset="-122"/>
+                <a:cs typeface="Lato" pitchFamily="34" charset="-120"/>
+              </a:rPr>
+              <a:t>plots, correlation and cause</a:t>
             </a:r>
             <a:endParaRPr lang="en-US" sz="5600" dirty="0"/>
           </a:p>
@@ -4442,11 +4459,11 @@
         <p:spPr>
           <a:xfrm>
             <a:off x="640080" y="1645920"/>
-            <a:ext cx="10881360" cy="3383280"/>
+            <a:ext cx="10881360" cy="2221992"/>
           </a:xfrm>
           <a:prstGeom prst="roundRect">
             <a:avLst>
-              <a:gd name="adj" fmla="val 2162"/>
+              <a:gd name="adj" fmla="val 3292"/>
             </a:avLst>
           </a:prstGeom>
           <a:solidFill>
@@ -4464,7 +4481,7 @@
         <p:spPr>
           <a:xfrm>
             <a:off x="841248" y="1847088"/>
-            <a:ext cx="10479024" cy="2980944"/>
+            <a:ext cx="10479024" cy="1819656"/>
           </a:xfrm>
           <a:prstGeom prst="rect">
             <a:avLst/>
@@ -4478,12 +4495,12 @@
           <a:p>
             <a:pPr algn="l" indent="0" marL="0">
               <a:lnSpc>
-                <a:spcPts val="2600"/>
-              </a:lnSpc>
-              <a:buNone/>
-            </a:pPr>
-            <a:r>
-              <a:rPr lang="en-US" sz="2000" dirty="0">
+                <a:spcPts val="2340"/>
+              </a:lnSpc>
+              <a:buNone/>
+            </a:pPr>
+            <a:r>
+              <a:rPr lang="en-US" sz="1800" dirty="0">
                 <a:solidFill>
                   <a:srgbClr val="FFFFFF"/>
                 </a:solidFill>
@@ -4493,139 +4510,133 @@
               </a:rPr>
               <a:t>cols = [</a:t>
             </a:r>
-            <a:endParaRPr lang="en-US" sz="2000" dirty="0"/>
-          </a:p>
-          <a:p>
-            <a:pPr algn="l" indent="0" marL="0">
-              <a:lnSpc>
-                <a:spcPts val="2600"/>
-              </a:lnSpc>
-              <a:buNone/>
-            </a:pPr>
-            <a:r>
-              <a:rPr lang="en-US" sz="2000" dirty="0">
-                <a:solidFill>
-                  <a:srgbClr val="FFFFFF"/>
+            <a:pPr algn="l" indent="0" marL="0">
+              <a:lnSpc>
+                <a:spcPts val="2340"/>
+              </a:lnSpc>
+              <a:buNone/>
+            </a:pPr>
+            <a:r>
+              <a:rPr lang="en-US" sz="1800" dirty="0">
+                <a:solidFill>
+                  <a:srgbClr val="E0BE36"/>
                 </a:solidFill>
                 <a:latin typeface="Courier New" pitchFamily="34" charset="0"/>
                 <a:ea typeface="Courier New" pitchFamily="34" charset="-122"/>
                 <a:cs typeface="Courier New" pitchFamily="34" charset="-120"/>
               </a:rPr>
-              <a:t>    </a:t>
-            </a:r>
-            <a:pPr algn="l" indent="0" marL="0">
-              <a:lnSpc>
-                <a:spcPts val="2600"/>
-              </a:lnSpc>
-              <a:buNone/>
-            </a:pPr>
-            <a:r>
-              <a:rPr lang="en-US" sz="2000" dirty="0">
-                <a:solidFill>
-                  <a:srgbClr val="E0BE36"/>
+              <a:t>"customers_counted"</a:t>
+            </a:r>
+            <a:pPr algn="l" indent="0" marL="0">
+              <a:lnSpc>
+                <a:spcPts val="2340"/>
+              </a:lnSpc>
+              <a:buNone/>
+            </a:pPr>
+            <a:r>
+              <a:rPr lang="en-US" sz="1800" dirty="0">
+                <a:solidFill>
+                  <a:srgbClr val="FFFFFF"/>
                 </a:solidFill>
                 <a:latin typeface="Courier New" pitchFamily="34" charset="0"/>
                 <a:ea typeface="Courier New" pitchFamily="34" charset="-122"/>
                 <a:cs typeface="Courier New" pitchFamily="34" charset="-120"/>
               </a:rPr>
-              <a:t>"customers_counted"</a:t>
-            </a:r>
-            <a:pPr algn="l" indent="0" marL="0">
-              <a:lnSpc>
-                <a:spcPts val="2600"/>
-              </a:lnSpc>
-              <a:buNone/>
-            </a:pPr>
-            <a:r>
-              <a:rPr lang="en-US" sz="2000" dirty="0">
-                <a:solidFill>
-                  <a:srgbClr val="FFFFFF"/>
+              <a:t>, </a:t>
+            </a:r>
+            <a:pPr algn="l" indent="0" marL="0">
+              <a:lnSpc>
+                <a:spcPts val="2340"/>
+              </a:lnSpc>
+              <a:buNone/>
+            </a:pPr>
+            <a:r>
+              <a:rPr lang="en-US" sz="1800" dirty="0">
+                <a:solidFill>
+                  <a:srgbClr val="E0BE36"/>
                 </a:solidFill>
                 <a:latin typeface="Courier New" pitchFamily="34" charset="0"/>
                 <a:ea typeface="Courier New" pitchFamily="34" charset="-122"/>
                 <a:cs typeface="Courier New" pitchFamily="34" charset="-120"/>
               </a:rPr>
-              <a:t>, </a:t>
-            </a:r>
-            <a:pPr algn="l" indent="0" marL="0">
-              <a:lnSpc>
-                <a:spcPts val="2600"/>
-              </a:lnSpc>
-              <a:buNone/>
-            </a:pPr>
-            <a:r>
-              <a:rPr lang="en-US" sz="2000" dirty="0">
-                <a:solidFill>
-                  <a:srgbClr val="E0BE36"/>
+              <a:t>"rain_mm"</a:t>
+            </a:r>
+            <a:pPr algn="l" indent="0" marL="0">
+              <a:lnSpc>
+                <a:spcPts val="2340"/>
+              </a:lnSpc>
+              <a:buNone/>
+            </a:pPr>
+            <a:r>
+              <a:rPr lang="en-US" sz="1800" dirty="0">
+                <a:solidFill>
+                  <a:srgbClr val="FFFFFF"/>
                 </a:solidFill>
                 <a:latin typeface="Courier New" pitchFamily="34" charset="0"/>
                 <a:ea typeface="Courier New" pitchFamily="34" charset="-122"/>
                 <a:cs typeface="Courier New" pitchFamily="34" charset="-120"/>
               </a:rPr>
-              <a:t>"rain_mm"</a:t>
-            </a:r>
-            <a:pPr algn="l" indent="0" marL="0">
-              <a:lnSpc>
-                <a:spcPts val="2600"/>
-              </a:lnSpc>
-              <a:buNone/>
-            </a:pPr>
-            <a:r>
-              <a:rPr lang="en-US" sz="2000" dirty="0">
-                <a:solidFill>
-                  <a:srgbClr val="FFFFFF"/>
+              <a:t>, </a:t>
+            </a:r>
+            <a:pPr algn="l" indent="0" marL="0">
+              <a:lnSpc>
+                <a:spcPts val="2340"/>
+              </a:lnSpc>
+              <a:buNone/>
+            </a:pPr>
+            <a:r>
+              <a:rPr lang="en-US" sz="1800" dirty="0">
+                <a:solidFill>
+                  <a:srgbClr val="E0BE36"/>
                 </a:solidFill>
                 <a:latin typeface="Courier New" pitchFamily="34" charset="0"/>
                 <a:ea typeface="Courier New" pitchFamily="34" charset="-122"/>
                 <a:cs typeface="Courier New" pitchFamily="34" charset="-120"/>
               </a:rPr>
-              <a:t>, </a:t>
-            </a:r>
-            <a:pPr algn="l" indent="0" marL="0">
-              <a:lnSpc>
-                <a:spcPts val="2600"/>
-              </a:lnSpc>
-              <a:buNone/>
-            </a:pPr>
-            <a:r>
-              <a:rPr lang="en-US" sz="2000" dirty="0">
-                <a:solidFill>
-                  <a:srgbClr val="E0BE36"/>
+              <a:t>"sale_lines"</a:t>
+            </a:r>
+            <a:pPr algn="l" indent="0" marL="0">
+              <a:lnSpc>
+                <a:spcPts val="2340"/>
+              </a:lnSpc>
+              <a:buNone/>
+            </a:pPr>
+            <a:r>
+              <a:rPr lang="en-US" sz="1800" dirty="0">
+                <a:solidFill>
+                  <a:srgbClr val="FFFFFF"/>
                 </a:solidFill>
                 <a:latin typeface="Courier New" pitchFamily="34" charset="0"/>
                 <a:ea typeface="Courier New" pitchFamily="34" charset="-122"/>
                 <a:cs typeface="Courier New" pitchFamily="34" charset="-120"/>
               </a:rPr>
-              <a:t>"sale_lines"</a:t>
-            </a:r>
-            <a:pPr algn="l" indent="0" marL="0">
-              <a:lnSpc>
-                <a:spcPts val="2600"/>
-              </a:lnSpc>
-              <a:buNone/>
-            </a:pPr>
-            <a:r>
-              <a:rPr lang="en-US" sz="2000" dirty="0">
-                <a:solidFill>
-                  <a:srgbClr val="FFFFFF"/>
+              <a:t>, </a:t>
+            </a:r>
+            <a:pPr algn="l" indent="0" marL="0">
+              <a:lnSpc>
+                <a:spcPts val="2340"/>
+              </a:lnSpc>
+              <a:buNone/>
+            </a:pPr>
+            <a:r>
+              <a:rPr lang="en-US" sz="1800" dirty="0">
+                <a:solidFill>
+                  <a:srgbClr val="E0BE36"/>
                 </a:solidFill>
                 <a:latin typeface="Courier New" pitchFamily="34" charset="0"/>
                 <a:ea typeface="Courier New" pitchFamily="34" charset="-122"/>
                 <a:cs typeface="Courier New" pitchFamily="34" charset="-120"/>
               </a:rPr>
-              <a:t>,</a:t>
-            </a:r>
-            <a:endParaRPr lang="en-US" sz="2000" dirty="0"/>
-          </a:p>
-          <a:p>
-            <a:pPr algn="l" indent="0" marL="0">
-              <a:lnSpc>
-                <a:spcPts val="2600"/>
-              </a:lnSpc>
-              <a:buNone/>
-            </a:pPr>
-            <a:r>
-              <a:rPr lang="en-US" sz="2000" dirty="0">
+              <a:t>"revenue_ugx"</a:t>
+            </a:r>
+            <a:pPr algn="l" indent="0" marL="0">
+              <a:lnSpc>
+                <a:spcPts val="2340"/>
+              </a:lnSpc>
+              <a:buNone/>
+            </a:pPr>
+            <a:r>
+              <a:rPr lang="en-US" sz="1800" dirty="0">
                 <a:solidFill>
                   <a:srgbClr val="FFFFFF"/>
                 </a:solidFill>
@@ -4633,36 +4644,39 @@
                 <a:ea typeface="Courier New" pitchFamily="34" charset="-122"/>
                 <a:cs typeface="Courier New" pitchFamily="34" charset="-120"/>
               </a:rPr>
-              <a:t>    </a:t>
-            </a:r>
-            <a:pPr algn="l" indent="0" marL="0">
-              <a:lnSpc>
-                <a:spcPts val="2600"/>
-              </a:lnSpc>
-              <a:buNone/>
-            </a:pPr>
-            <a:r>
-              <a:rPr lang="en-US" sz="2000" dirty="0">
-                <a:solidFill>
-                  <a:srgbClr val="E0BE36"/>
+              <a:t>]</a:t>
+            </a:r>
+            <a:endParaRPr lang="en-US" sz="1800" dirty="0"/>
+          </a:p>
+          <a:p>
+            <a:pPr algn="l" indent="0" marL="0">
+              <a:lnSpc>
+                <a:spcPts val="2340"/>
+              </a:lnSpc>
+              <a:buNone/>
+            </a:pPr>
+            <a:r>
+              <a:rPr lang="en-US" sz="1800" dirty="0">
+                <a:solidFill>
+                  <a:srgbClr val="FFFFFF"/>
                 </a:solidFill>
                 <a:latin typeface="Courier New" pitchFamily="34" charset="0"/>
                 <a:ea typeface="Courier New" pitchFamily="34" charset="-122"/>
                 <a:cs typeface="Courier New" pitchFamily="34" charset="-120"/>
               </a:rPr>
-              <a:t>"revenue_ugx"</a:t>
-            </a:r>
-            <a:endParaRPr lang="en-US" sz="2000" dirty="0"/>
-          </a:p>
-          <a:p>
-            <a:pPr algn="l" indent="0" marL="0">
-              <a:lnSpc>
-                <a:spcPts val="2600"/>
-              </a:lnSpc>
-              <a:buNone/>
-            </a:pPr>
-            <a:r>
-              <a:rPr lang="en-US" sz="2000" dirty="0">
+              <a:t>table = daily[cols].corr()</a:t>
+            </a:r>
+            <a:endParaRPr lang="en-US" sz="1800" dirty="0"/>
+          </a:p>
+          <a:p>
+            <a:pPr algn="l" indent="0" marL="0">
+              <a:lnSpc>
+                <a:spcPts val="2340"/>
+              </a:lnSpc>
+              <a:buNone/>
+            </a:pPr>
+            <a:r>
+              <a:rPr lang="en-US" sz="1800" dirty="0">
                 <a:solidFill>
                   <a:srgbClr val="FFFFFF"/>
                 </a:solidFill>
@@ -4670,19 +4684,16 @@
                 <a:ea typeface="Courier New" pitchFamily="34" charset="-122"/>
                 <a:cs typeface="Courier New" pitchFamily="34" charset="-120"/>
               </a:rPr>
-              <a:t>]</a:t>
-            </a:r>
-            <a:endParaRPr lang="en-US" sz="2000" dirty="0"/>
-          </a:p>
-          <a:p>
-            <a:pPr algn="l" indent="0" marL="0">
-              <a:lnSpc>
-                <a:spcPts val="2600"/>
-              </a:lnSpc>
-              <a:buNone/>
-            </a:pPr>
-            <a:r>
-              <a:rPr lang="en-US" sz="2000" dirty="0">
+              <a:t>sns.heatmap(table, annot=</a:t>
+            </a:r>
+            <a:pPr algn="l" indent="0" marL="0">
+              <a:lnSpc>
+                <a:spcPts val="2340"/>
+              </a:lnSpc>
+              <a:buNone/>
+            </a:pPr>
+            <a:r>
+              <a:rPr lang="en-US" sz="1800" b="1" dirty="0">
                 <a:solidFill>
                   <a:srgbClr val="FFFFFF"/>
                 </a:solidFill>
@@ -4690,19 +4701,16 @@
                 <a:ea typeface="Courier New" pitchFamily="34" charset="-122"/>
                 <a:cs typeface="Courier New" pitchFamily="34" charset="-120"/>
               </a:rPr>
-              <a:t>table = daily[cols].corr()</a:t>
-            </a:r>
-            <a:endParaRPr lang="en-US" sz="2000" dirty="0"/>
-          </a:p>
-          <a:p>
-            <a:pPr algn="l" indent="0" marL="0">
-              <a:lnSpc>
-                <a:spcPts val="2600"/>
-              </a:lnSpc>
-              <a:buNone/>
-            </a:pPr>
-            <a:r>
-              <a:rPr lang="en-US" sz="2000" dirty="0">
+              <a:t>True</a:t>
+            </a:r>
+            <a:pPr algn="l" indent="0" marL="0">
+              <a:lnSpc>
+                <a:spcPts val="2340"/>
+              </a:lnSpc>
+              <a:buNone/>
+            </a:pPr>
+            <a:r>
+              <a:rPr lang="en-US" sz="1800" dirty="0">
                 <a:solidFill>
                   <a:srgbClr val="FFFFFF"/>
                 </a:solidFill>
@@ -4710,16 +4718,19 @@
                 <a:ea typeface="Courier New" pitchFamily="34" charset="-122"/>
                 <a:cs typeface="Courier New" pitchFamily="34" charset="-120"/>
               </a:rPr>
-              <a:t>sns.heatmap(table, annot=</a:t>
-            </a:r>
-            <a:pPr algn="l" indent="0" marL="0">
-              <a:lnSpc>
-                <a:spcPts val="2600"/>
-              </a:lnSpc>
-              <a:buNone/>
-            </a:pPr>
-            <a:r>
-              <a:rPr lang="en-US" sz="2000" b="1" dirty="0">
+              <a:t>, vmin=-1, vmax=1)</a:t>
+            </a:r>
+            <a:endParaRPr lang="en-US" sz="1800" dirty="0"/>
+          </a:p>
+          <a:p>
+            <a:pPr algn="l" indent="0" marL="0">
+              <a:lnSpc>
+                <a:spcPts val="2340"/>
+              </a:lnSpc>
+              <a:buNone/>
+            </a:pPr>
+            <a:r>
+              <a:rPr lang="en-US" sz="1800" dirty="0">
                 <a:solidFill>
                   <a:srgbClr val="FFFFFF"/>
                 </a:solidFill>
@@ -4727,16 +4738,19 @@
                 <a:ea typeface="Courier New" pitchFamily="34" charset="-122"/>
                 <a:cs typeface="Courier New" pitchFamily="34" charset="-120"/>
               </a:rPr>
-              <a:t>True</a:t>
-            </a:r>
-            <a:pPr algn="l" indent="0" marL="0">
-              <a:lnSpc>
-                <a:spcPts val="2600"/>
-              </a:lnSpc>
-              <a:buNone/>
-            </a:pPr>
-            <a:r>
-              <a:rPr lang="en-US" sz="2000" dirty="0">
+              <a:t>plt.show()</a:t>
+            </a:r>
+            <a:endParaRPr lang="en-US" sz="1800" dirty="0"/>
+          </a:p>
+          <a:p>
+            <a:pPr algn="l" indent="0" marL="0">
+              <a:lnSpc>
+                <a:spcPts val="2340"/>
+              </a:lnSpc>
+              <a:buNone/>
+            </a:pPr>
+            <a:r>
+              <a:rPr lang="en-US" sz="1800" dirty="0">
                 <a:solidFill>
                   <a:srgbClr val="FFFFFF"/>
                 </a:solidFill>
@@ -4744,39 +4758,33 @@
                 <a:ea typeface="Courier New" pitchFamily="34" charset="-122"/>
                 <a:cs typeface="Courier New" pitchFamily="34" charset="-120"/>
               </a:rPr>
-              <a:t>, vmin=-1, vmax=1)</a:t>
-            </a:r>
-            <a:endParaRPr lang="en-US" sz="2000" dirty="0"/>
-          </a:p>
-          <a:p>
-            <a:pPr algn="l" indent="0" marL="0">
-              <a:lnSpc>
-                <a:spcPts val="2600"/>
-              </a:lnSpc>
-              <a:buNone/>
-            </a:pPr>
-            <a:r>
-              <a:rPr lang="en-US" sz="2000" dirty="0">
-                <a:solidFill>
-                  <a:srgbClr val="FFFFFF"/>
+              <a:t>print(round(table.loc[</a:t>
+            </a:r>
+            <a:pPr algn="l" indent="0" marL="0">
+              <a:lnSpc>
+                <a:spcPts val="2340"/>
+              </a:lnSpc>
+              <a:buNone/>
+            </a:pPr>
+            <a:r>
+              <a:rPr lang="en-US" sz="1800" dirty="0">
+                <a:solidFill>
+                  <a:srgbClr val="E0BE36"/>
                 </a:solidFill>
                 <a:latin typeface="Courier New" pitchFamily="34" charset="0"/>
                 <a:ea typeface="Courier New" pitchFamily="34" charset="-122"/>
                 <a:cs typeface="Courier New" pitchFamily="34" charset="-120"/>
               </a:rPr>
-              <a:t>plt.show()</a:t>
-            </a:r>
-            <a:endParaRPr lang="en-US" sz="2000" dirty="0"/>
-          </a:p>
-          <a:p>
-            <a:pPr algn="l" indent="0" marL="0">
-              <a:lnSpc>
-                <a:spcPts val="2600"/>
-              </a:lnSpc>
-              <a:buNone/>
-            </a:pPr>
-            <a:r>
-              <a:rPr lang="en-US" sz="2000" dirty="0">
+              <a:t>"rain_mm"</a:t>
+            </a:r>
+            <a:pPr algn="l" indent="0" marL="0">
+              <a:lnSpc>
+                <a:spcPts val="2340"/>
+              </a:lnSpc>
+              <a:buNone/>
+            </a:pPr>
+            <a:r>
+              <a:rPr lang="en-US" sz="1800" dirty="0">
                 <a:solidFill>
                   <a:srgbClr val="FFFFFF"/>
                 </a:solidFill>
@@ -4784,16 +4792,16 @@
                 <a:ea typeface="Courier New" pitchFamily="34" charset="-122"/>
                 <a:cs typeface="Courier New" pitchFamily="34" charset="-120"/>
               </a:rPr>
-              <a:t>print(round(table.loc[</a:t>
-            </a:r>
-            <a:pPr algn="l" indent="0" marL="0">
-              <a:lnSpc>
-                <a:spcPts val="2600"/>
-              </a:lnSpc>
-              <a:buNone/>
-            </a:pPr>
-            <a:r>
-              <a:rPr lang="en-US" sz="2000" dirty="0">
+              <a:t>, </a:t>
+            </a:r>
+            <a:pPr algn="l" indent="0" marL="0">
+              <a:lnSpc>
+                <a:spcPts val="2340"/>
+              </a:lnSpc>
+              <a:buNone/>
+            </a:pPr>
+            <a:r>
+              <a:rPr lang="en-US" sz="1800" dirty="0">
                 <a:solidFill>
                   <a:srgbClr val="E0BE36"/>
                 </a:solidFill>
@@ -4801,16 +4809,16 @@
                 <a:ea typeface="Courier New" pitchFamily="34" charset="-122"/>
                 <a:cs typeface="Courier New" pitchFamily="34" charset="-120"/>
               </a:rPr>
-              <a:t>"rain_mm"</a:t>
-            </a:r>
-            <a:pPr algn="l" indent="0" marL="0">
-              <a:lnSpc>
-                <a:spcPts val="2600"/>
-              </a:lnSpc>
-              <a:buNone/>
-            </a:pPr>
-            <a:r>
-              <a:rPr lang="en-US" sz="2000" dirty="0">
+              <a:t>"customers_counted"</a:t>
+            </a:r>
+            <a:pPr algn="l" indent="0" marL="0">
+              <a:lnSpc>
+                <a:spcPts val="2340"/>
+              </a:lnSpc>
+              <a:buNone/>
+            </a:pPr>
+            <a:r>
+              <a:rPr lang="en-US" sz="1800" dirty="0">
                 <a:solidFill>
                   <a:srgbClr val="FFFFFF"/>
                 </a:solidFill>
@@ -4818,53 +4826,53 @@
                 <a:ea typeface="Courier New" pitchFamily="34" charset="-122"/>
                 <a:cs typeface="Courier New" pitchFamily="34" charset="-120"/>
               </a:rPr>
-              <a:t>, </a:t>
-            </a:r>
-            <a:pPr algn="l" indent="0" marL="0">
-              <a:lnSpc>
-                <a:spcPts val="2600"/>
-              </a:lnSpc>
-              <a:buNone/>
-            </a:pPr>
-            <a:r>
-              <a:rPr lang="en-US" sz="2000" dirty="0">
-                <a:solidFill>
-                  <a:srgbClr val="E0BE36"/>
+              <a:t>], 3))</a:t>
+            </a:r>
+            <a:endParaRPr lang="en-US" sz="1800" dirty="0"/>
+          </a:p>
+          <a:p>
+            <a:pPr algn="l" indent="0" marL="0">
+              <a:lnSpc>
+                <a:spcPts val="2340"/>
+              </a:lnSpc>
+              <a:buNone/>
+            </a:pPr>
+            <a:r>
+              <a:rPr lang="en-US" sz="1800" dirty="0">
+                <a:solidFill>
+                  <a:srgbClr val="FFFFFF"/>
                 </a:solidFill>
                 <a:latin typeface="Courier New" pitchFamily="34" charset="0"/>
                 <a:ea typeface="Courier New" pitchFamily="34" charset="-122"/>
                 <a:cs typeface="Courier New" pitchFamily="34" charset="-120"/>
               </a:rPr>
-              <a:t>"customers_counted"</a:t>
-            </a:r>
-            <a:pPr algn="l" indent="0" marL="0">
-              <a:lnSpc>
-                <a:spcPts val="2600"/>
-              </a:lnSpc>
-              <a:buNone/>
-            </a:pPr>
-            <a:r>
-              <a:rPr lang="en-US" sz="2000" dirty="0">
-                <a:solidFill>
-                  <a:srgbClr val="FFFFFF"/>
+              <a:t>print(round(table.loc[</a:t>
+            </a:r>
+            <a:pPr algn="l" indent="0" marL="0">
+              <a:lnSpc>
+                <a:spcPts val="2340"/>
+              </a:lnSpc>
+              <a:buNone/>
+            </a:pPr>
+            <a:r>
+              <a:rPr lang="en-US" sz="1800" dirty="0">
+                <a:solidFill>
+                  <a:srgbClr val="E0BE36"/>
                 </a:solidFill>
                 <a:latin typeface="Courier New" pitchFamily="34" charset="0"/>
                 <a:ea typeface="Courier New" pitchFamily="34" charset="-122"/>
                 <a:cs typeface="Courier New" pitchFamily="34" charset="-120"/>
               </a:rPr>
-              <a:t>], 3))</a:t>
-            </a:r>
-            <a:endParaRPr lang="en-US" sz="2000" dirty="0"/>
-          </a:p>
-          <a:p>
-            <a:pPr algn="l" indent="0" marL="0">
-              <a:lnSpc>
-                <a:spcPts val="2600"/>
-              </a:lnSpc>
-              <a:buNone/>
-            </a:pPr>
-            <a:r>
-              <a:rPr lang="en-US" sz="2000" dirty="0">
+              <a:t>"sale_lines"</a:t>
+            </a:r>
+            <a:pPr algn="l" indent="0" marL="0">
+              <a:lnSpc>
+                <a:spcPts val="2340"/>
+              </a:lnSpc>
+              <a:buNone/>
+            </a:pPr>
+            <a:r>
+              <a:rPr lang="en-US" sz="1800" dirty="0">
                 <a:solidFill>
                   <a:srgbClr val="FFFFFF"/>
                 </a:solidFill>
@@ -4872,16 +4880,16 @@
                 <a:ea typeface="Courier New" pitchFamily="34" charset="-122"/>
                 <a:cs typeface="Courier New" pitchFamily="34" charset="-120"/>
               </a:rPr>
-              <a:t>print(round(table.loc[</a:t>
-            </a:r>
-            <a:pPr algn="l" indent="0" marL="0">
-              <a:lnSpc>
-                <a:spcPts val="2600"/>
-              </a:lnSpc>
-              <a:buNone/>
-            </a:pPr>
-            <a:r>
-              <a:rPr lang="en-US" sz="2000" dirty="0">
+              <a:t>, </a:t>
+            </a:r>
+            <a:pPr algn="l" indent="0" marL="0">
+              <a:lnSpc>
+                <a:spcPts val="2340"/>
+              </a:lnSpc>
+              <a:buNone/>
+            </a:pPr>
+            <a:r>
+              <a:rPr lang="en-US" sz="1800" dirty="0">
                 <a:solidFill>
                   <a:srgbClr val="E0BE36"/>
                 </a:solidFill>
@@ -4889,16 +4897,16 @@
                 <a:ea typeface="Courier New" pitchFamily="34" charset="-122"/>
                 <a:cs typeface="Courier New" pitchFamily="34" charset="-120"/>
               </a:rPr>
-              <a:t>"sale_lines"</a:t>
-            </a:r>
-            <a:pPr algn="l" indent="0" marL="0">
-              <a:lnSpc>
-                <a:spcPts val="2600"/>
-              </a:lnSpc>
-              <a:buNone/>
-            </a:pPr>
-            <a:r>
-              <a:rPr lang="en-US" sz="2000" dirty="0">
+              <a:t>"revenue_ugx"</a:t>
+            </a:r>
+            <a:pPr algn="l" indent="0" marL="0">
+              <a:lnSpc>
+                <a:spcPts val="2340"/>
+              </a:lnSpc>
+              <a:buNone/>
+            </a:pPr>
+            <a:r>
+              <a:rPr lang="en-US" sz="1800" dirty="0">
                 <a:solidFill>
                   <a:srgbClr val="FFFFFF"/>
                 </a:solidFill>
@@ -4906,43 +4914,9 @@
                 <a:ea typeface="Courier New" pitchFamily="34" charset="-122"/>
                 <a:cs typeface="Courier New" pitchFamily="34" charset="-120"/>
               </a:rPr>
-              <a:t>, </a:t>
-            </a:r>
-            <a:pPr algn="l" indent="0" marL="0">
-              <a:lnSpc>
-                <a:spcPts val="2600"/>
-              </a:lnSpc>
-              <a:buNone/>
-            </a:pPr>
-            <a:r>
-              <a:rPr lang="en-US" sz="2000" dirty="0">
-                <a:solidFill>
-                  <a:srgbClr val="E0BE36"/>
-                </a:solidFill>
-                <a:latin typeface="Courier New" pitchFamily="34" charset="0"/>
-                <a:ea typeface="Courier New" pitchFamily="34" charset="-122"/>
-                <a:cs typeface="Courier New" pitchFamily="34" charset="-120"/>
-              </a:rPr>
-              <a:t>"revenue_ugx"</a:t>
-            </a:r>
-            <a:pPr algn="l" indent="0" marL="0">
-              <a:lnSpc>
-                <a:spcPts val="2600"/>
-              </a:lnSpc>
-              <a:buNone/>
-            </a:pPr>
-            <a:r>
-              <a:rPr lang="en-US" sz="2000" dirty="0">
-                <a:solidFill>
-                  <a:srgbClr val="FFFFFF"/>
-                </a:solidFill>
-                <a:latin typeface="Courier New" pitchFamily="34" charset="0"/>
-                <a:ea typeface="Courier New" pitchFamily="34" charset="-122"/>
-                <a:cs typeface="Courier New" pitchFamily="34" charset="-120"/>
-              </a:rPr>
               <a:t>], 3))</a:t>
             </a:r>
-            <a:endParaRPr lang="en-US" sz="2000" dirty="0"/>
+            <a:endParaRPr lang="en-US" sz="1800" dirty="0"/>
           </a:p>
         </p:txBody>
       </p:sp>
@@ -4954,8 +4928,8 @@
         </p:nvSpPr>
         <p:spPr>
           <a:xfrm>
-            <a:off x="640080" y="5212080"/>
-            <a:ext cx="8046720" cy="1051560"/>
+            <a:off x="640080" y="4050792"/>
+            <a:ext cx="8046720" cy="2212848"/>
           </a:xfrm>
           <a:prstGeom prst="rect">
             <a:avLst/>
@@ -4969,7 +4943,7 @@
           <a:p>
             <a:pPr algn="l" indent="0" marL="0">
               <a:lnSpc>
-                <a:spcPts val="2760"/>
+                <a:spcPts val="3120"/>
               </a:lnSpc>
               <a:spcAft>
                 <a:spcPts val="1010"/>
@@ -4977,7 +4951,7 @@
               <a:buNone/>
             </a:pPr>
             <a:r>
-              <a:rPr lang="en-US" sz="2300" dirty="0">
+              <a:rPr lang="en-US" sz="2600" dirty="0">
                 <a:solidFill>
                   <a:srgbClr val="111111"/>
                 </a:solidFill>
@@ -4987,12 +4961,12 @@
               </a:rPr>
               <a:t>Predict whether rain_mm is strongly related to customers.</a:t>
             </a:r>
-            <a:endParaRPr lang="en-US" sz="2300" dirty="0"/>
-          </a:p>
-          <a:p>
-            <a:pPr algn="l" indent="0" marL="0">
-              <a:lnSpc>
-                <a:spcPts val="2760"/>
+            <a:endParaRPr lang="en-US" sz="2600" dirty="0"/>
+          </a:p>
+          <a:p>
+            <a:pPr algn="l" indent="0" marL="0">
+              <a:lnSpc>
+                <a:spcPts val="3120"/>
               </a:lnSpc>
               <a:spcAft>
                 <a:spcPts val="1010"/>
@@ -5000,7 +4974,7 @@
               <a:buNone/>
             </a:pPr>
             <a:r>
-              <a:rPr lang="en-US" sz="2300" dirty="0">
+              <a:rPr lang="en-US" sz="2600" dirty="0">
                 <a:solidFill>
                   <a:srgbClr val="111111"/>
                 </a:solidFill>
@@ -5010,7 +4984,7 @@
               </a:rPr>
               <a:t>Write your guess on paper before we run it.</a:t>
             </a:r>
-            <a:endParaRPr lang="en-US" sz="2300" dirty="0"/>
+            <a:endParaRPr lang="en-US" sz="2600" dirty="0"/>
           </a:p>
         </p:txBody>
       </p:sp>
@@ -5030,7 +5004,7 @@
         </p:blipFill>
         <p:spPr>
           <a:xfrm>
-            <a:off x="10241280" y="5214366"/>
+            <a:off x="10241280" y="5031486"/>
             <a:ext cx="1188720" cy="1046988"/>
           </a:xfrm>
           <a:prstGeom prst="rect">
@@ -6225,15 +6199,15 @@
           <a:p>
             <a:pPr algn="l" indent="0" marL="0">
               <a:lnSpc>
-                <a:spcPts val="3480"/>
+                <a:spcPts val="3120"/>
               </a:lnSpc>
               <a:spcAft>
-                <a:spcPts val="2520"/>
+                <a:spcPts val="2020"/>
               </a:spcAft>
               <a:buNone/>
             </a:pPr>
             <a:r>
-              <a:rPr lang="en-US" sz="2900" dirty="0">
+              <a:rPr lang="en-US" sz="2600" dirty="0">
                 <a:solidFill>
                   <a:srgbClr val="111111"/>
                 </a:solidFill>
@@ -6241,22 +6215,22 @@
                 <a:ea typeface="Lato" pitchFamily="34" charset="-122"/>
                 <a:cs typeface="Lato" pitchFamily="34" charset="-120"/>
               </a:rPr>
-              <a:t>Check the rain question for each shop separately. For each branch find the correlation between rain_mm and customers_counted. Say whether rain matters at any shop and why a correlation could not prove that it does.</a:t>
-            </a:r>
-            <a:endParaRPr lang="en-US" sz="2900" dirty="0"/>
-          </a:p>
-          <a:p>
-            <a:pPr algn="l" indent="0" marL="0">
-              <a:lnSpc>
-                <a:spcPts val="3480"/>
+              <a:t>Check the rain question for each shop separately.</a:t>
+            </a:r>
+            <a:endParaRPr lang="en-US" sz="2600" dirty="0"/>
+          </a:p>
+          <a:p>
+            <a:pPr algn="l" indent="0" marL="0">
+              <a:lnSpc>
+                <a:spcPts val="3120"/>
               </a:lnSpc>
               <a:spcAft>
-                <a:spcPts val="2520"/>
+                <a:spcPts val="2020"/>
               </a:spcAft>
               <a:buNone/>
             </a:pPr>
             <a:r>
-              <a:rPr lang="en-US" sz="2900" dirty="0">
+              <a:rPr lang="en-US" sz="2600" dirty="0">
                 <a:solidFill>
                   <a:srgbClr val="111111"/>
                 </a:solidFill>
@@ -6264,9 +6238,55 @@
                 <a:ea typeface="Lato" pitchFamily="34" charset="-122"/>
                 <a:cs typeface="Lato" pitchFamily="34" charset="-120"/>
               </a:rPr>
+              <a:t>For each branch find the correlation between rain_mm and customers_counted.</a:t>
+            </a:r>
+            <a:endParaRPr lang="en-US" sz="2600" dirty="0"/>
+          </a:p>
+          <a:p>
+            <a:pPr algn="l" indent="0" marL="0">
+              <a:lnSpc>
+                <a:spcPts val="3120"/>
+              </a:lnSpc>
+              <a:spcAft>
+                <a:spcPts val="2020"/>
+              </a:spcAft>
+              <a:buNone/>
+            </a:pPr>
+            <a:r>
+              <a:rPr lang="en-US" sz="2600" dirty="0">
+                <a:solidFill>
+                  <a:srgbClr val="111111"/>
+                </a:solidFill>
+                <a:latin typeface="Lato" pitchFamily="34" charset="0"/>
+                <a:ea typeface="Lato" pitchFamily="34" charset="-122"/>
+                <a:cs typeface="Lato" pitchFamily="34" charset="-120"/>
+              </a:rPr>
+              <a:t>Say whether rain matters at any shop and why a correlation could not prove that it does.</a:t>
+            </a:r>
+            <a:endParaRPr lang="en-US" sz="2600" dirty="0"/>
+          </a:p>
+          <a:p>
+            <a:pPr algn="l" indent="0" marL="0">
+              <a:lnSpc>
+                <a:spcPts val="3120"/>
+              </a:lnSpc>
+              <a:spcAft>
+                <a:spcPts val="2020"/>
+              </a:spcAft>
+              <a:buNone/>
+            </a:pPr>
+            <a:r>
+              <a:rPr lang="en-US" sz="2600" dirty="0">
+                <a:solidFill>
+                  <a:srgbClr val="111111"/>
+                </a:solidFill>
+                <a:latin typeface="Lato" pitchFamily="34" charset="0"/>
+                <a:ea typeface="Lato" pitchFamily="34" charset="-122"/>
+                <a:cs typeface="Lato" pitchFamily="34" charset="-120"/>
+              </a:rPr>
               <a:t>Save it as DA15. Write two sentences: what you changed and how you checked it.</a:t>
             </a:r>
-            <a:endParaRPr lang="en-US" sz="2900" dirty="0"/>
+            <a:endParaRPr lang="en-US" sz="2600" dirty="0"/>
           </a:p>
         </p:txBody>
       </p:sp>
